--- a/dist/초4/수학/도형/초4_수학_도형_05_여러가지사각형.pptx
+++ b/dist/초4/수학/도형/초4_수학_도형_05_여러가지사각형.pptx
@@ -121,13 +121,13 @@
   <p:extLst>
     <p:ext uri="{521415D9-36F7-43E2-AB2F-B90AF26B5E84}">
       <p14:sectionLst xmlns:p14="http://schemas.microsoft.com/office/powerpoint/2010/main">
-        <p14:section name="도입" id="{65bbfbfb-3cda-1d76-708c-8bdff414e1f6}">
+        <p14:section name="도입" id="{c7e6d25c-a736-228a-c018-e54ff4bca482}">
           <p14:sldIdLst>
             <p14:sldId id="256"/>
             <p14:sldId id="257"/>
           </p14:sldIdLst>
         </p14:section>
-        <p14:section name="개념" id="{99611e55-0c1e-19e4-19cb-2b66080afb49}">
+        <p14:section name="개념" id="{8f3fcc96-ec34-d2b6-2ef3-8cb4a26eb1b7}">
           <p14:sldIdLst>
             <p14:sldId id="258"/>
             <p14:sldId id="259"/>
@@ -136,32 +136,32 @@
             <p14:sldId id="263"/>
           </p14:sldIdLst>
         </p14:section>
-        <p14:section name="연습" id="{68e39203-0ad8-7476-450e-68097215f5e1}">
+        <p14:section name="연습" id="{1272a763-6638-5a61-8a3c-df034ae5d2a8}">
           <p14:sldIdLst>
             <p14:sldId id="261"/>
             <p14:sldId id="264"/>
             <p14:sldId id="265"/>
           </p14:sldIdLst>
         </p14:section>
-        <p14:section name="개념" id="{4fa2f646-dffa-81a2-8a2f-0755d21497d6}">
+        <p14:section name="개념" id="{f79c1e6f-756b-ec69-48be-152a830312fc}">
           <p14:sldIdLst/>
         </p14:section>
-        <p14:section name="연습" id="{91b39ea9-dc3a-a16f-71bc-20863c10e304}">
+        <p14:section name="연습" id="{56044405-4a24-c6c0-3914-6a71db1e4f42}">
           <p14:sldIdLst/>
         </p14:section>
-        <p14:section name="확인" id="{3967fe64-6acc-5381-f996-60155b91f086}">
+        <p14:section name="확인" id="{ae095da7-4b18-1664-d311-78412ce5dea0}">
           <p14:sldIdLst>
             <p14:sldId id="266"/>
             <p14:sldId id="267"/>
             <p14:sldId id="268"/>
           </p14:sldIdLst>
         </p14:section>
-        <p14:section name="정리" id="{e2749c71-09a1-ed73-5abc-e9f52e295bf3}">
+        <p14:section name="정리" id="{f5568974-f1d3-5fba-612b-ff5b19251c39}">
           <p14:sldIdLst>
             <p14:sldId id="269"/>
           </p14:sldIdLst>
         </p14:section>
-        <p14:section name="보충" id="{e36cf919-289a-033e-6b72-06fc04f5bcb4}">
+        <p14:section name="보충" id="{77f0ee90-d096-f4f5-2c4d-674463d3043a}">
           <p14:sldIdLst>
             <p14:sldId id="270"/>
           </p14:sldIdLst>
@@ -1285,7 +1285,7 @@
 - 모눈의 선을 따라 손가락으로 두 직선을 늘여 보며 “끝까지 가도 만나?”라고 묻습니다. 만나는 곳에는 삼각자의 직각을 대어 봅니다.
 - 두 개 이상 헷갈리면 S15(보충)를 먼저 합니다. 보충으로도 어려우면 초4 ‘수직과 평행’을 먼저 다시 합니다.
 주의
-- 다는 만나는 곳이 모눈 밖에 있을 수 있지만, 두 직선이 서로 다른 방향으로 기울어 있으니 늘이면 만납니다.</a:t>
+- 다는 두 직선이 만나지만 만나는 곳의 각이 직각이 아닙니다. 삼각자의 직각을 대어 보면 맞지 않습니다.</a:t>
             </a:r>
             <a:endParaRPr lang="en-US" dirty="0"/>
           </a:p>
@@ -4151,7 +4151,7 @@
                 <a:ea typeface="맑은 고딕" pitchFamily="34" charset="-122"/>
                 <a:cs typeface="맑은 고딕" pitchFamily="34" charset="-120"/>
               </a:rPr>
-              <a:t>사다리꼴예요.</a:t>
+              <a:t>사다리꼴이에요.</a:t>
             </a:r>
             <a:endParaRPr lang="ko-KR" sz="3000" dirty="0"/>
           </a:p>
@@ -4254,7 +4254,7 @@
                 <a:ea typeface="맑은 고딕" pitchFamily="34" charset="-122"/>
                 <a:cs typeface="맑은 고딕" pitchFamily="34" charset="-120"/>
               </a:rPr>
-              <a:t>정사각형예요.</a:t>
+              <a:t>정사각형이에요.</a:t>
             </a:r>
             <a:endParaRPr lang="ko-KR" sz="3000" dirty="0"/>
           </a:p>
@@ -4357,7 +4357,7 @@
                 <a:ea typeface="맑은 고딕" pitchFamily="34" charset="-122"/>
                 <a:cs typeface="맑은 고딕" pitchFamily="34" charset="-120"/>
               </a:rPr>
-              <a:t>평행사변형예요.</a:t>
+              <a:t>평행사변형이에요.</a:t>
             </a:r>
             <a:endParaRPr lang="ko-KR" sz="3000" dirty="0"/>
           </a:p>
@@ -4460,7 +4460,7 @@
                 <a:ea typeface="맑은 고딕" pitchFamily="34" charset="-122"/>
                 <a:cs typeface="맑은 고딕" pitchFamily="34" charset="-120"/>
               </a:rPr>
-              <a:t>평행사변형예요.</a:t>
+              <a:t>평행사변형이에요.</a:t>
             </a:r>
             <a:endParaRPr lang="ko-KR" sz="3000" dirty="0"/>
           </a:p>
